--- a/dapan/cnttnc/Câu1.pptx
+++ b/dapan/cnttnc/Câu1.pptx
@@ -5770,7 +5770,7 @@
         </p:blipFill>
         <p:spPr>
           <a:xfrm>
-            <a:off x="1967038" y="1015327"/>
+            <a:off x="1967038" y="1044823"/>
             <a:ext cx="7737401" cy="5158268"/>
           </a:xfrm>
           <a:prstGeom prst="roundRect">
